--- a/Ch05_Polyphony.pptx
+++ b/Ch05_Polyphony.pptx
@@ -2744,7 +2744,7 @@
                 <a:ea typeface="Calibri" pitchFamily="34" charset="-122"/>
                 <a:cs typeface="Calibri" pitchFamily="34" charset="-120"/>
               </a:rPr>
-              <a:t>• 巴黎聖母院樂手在 13 世紀初，為 discant clausula 的上聲部</a:t>
+              <a:t>• 13 世紀初，巴黎樂手為 discant clausula 上聲部加上拉丁新詞（如同 tropes 之於花唱）</a:t>
             </a:r>
             <a:endParaRPr lang="en-US" sz="1400" dirty="0"/>
           </a:p>
@@ -2761,7 +2761,7 @@
                 <a:ea typeface="Calibri" pitchFamily="34" charset="-122"/>
                 <a:cs typeface="Calibri" pitchFamily="34" charset="-120"/>
               </a:rPr>
-              <a:t>  加上新的拉丁歌詞——如同之前為花唱填詞而成的 tropes 和 sequences</a:t>
+              <a:t>• 新體裁稱為「motet」：拉丁 motetus &lt; 法文 mot 字</a:t>
             </a:r>
             <a:endParaRPr lang="en-US" sz="1400" dirty="0"/>
           </a:p>
@@ -2778,7 +2778,7 @@
                 <a:ea typeface="Calibri" pitchFamily="34" charset="-122"/>
                 <a:cs typeface="Calibri" pitchFamily="34" charset="-120"/>
               </a:rPr>
-              <a:t>• 產生的新體裁稱為「motet」（拉丁 motetus，源自法文 mot =「字」）</a:t>
+              <a:t>• 音樂裝飾反過來被文字裝飾：decoration gets decorated in turn</a:t>
             </a:r>
             <a:endParaRPr lang="en-US" sz="1400" dirty="0"/>
           </a:p>
@@ -2795,41 +2795,7 @@
                 <a:ea typeface="Calibri" pitchFamily="34" charset="-122"/>
                 <a:cs typeface="Calibri" pitchFamily="34" charset="-120"/>
               </a:rPr>
-              <a:t>• 由此，一段原本無詞的音樂裝飾（clausula），反過來被「加上文字裝飾」</a:t>
-            </a:r>
-            <a:endParaRPr lang="en-US" sz="1400" dirty="0"/>
-          </a:p>
-          <a:p>
-            <a:pPr indent="0" marL="0">
-              <a:buNone/>
-            </a:pPr>
-            <a:r>
-              <a:rPr lang="en-US" sz="1400" dirty="0">
-                <a:solidFill>
-                  <a:srgbClr val="FBF5E6"/>
-                </a:solidFill>
-                <a:latin typeface="Calibri" pitchFamily="34" charset="0"/>
-                <a:ea typeface="Calibri" pitchFamily="34" charset="-122"/>
-                <a:cs typeface="Calibri" pitchFamily="34" charset="-120"/>
-              </a:rPr>
-              <a:t>  A musical decoration gets decorated in turn with words</a:t>
-            </a:r>
-            <a:endParaRPr lang="en-US" sz="1400" dirty="0"/>
-          </a:p>
-          <a:p>
-            <a:pPr indent="0" marL="0">
-              <a:buNone/>
-            </a:pPr>
-            <a:r>
-              <a:rPr lang="en-US" sz="1400" dirty="0">
-                <a:solidFill>
-                  <a:srgbClr val="FBF5E6"/>
-                </a:solidFill>
-                <a:latin typeface="Calibri" pitchFamily="34" charset="0"/>
-                <a:ea typeface="Calibri" pitchFamily="34" charset="-122"/>
-                <a:cs typeface="Calibri" pitchFamily="34" charset="-120"/>
-              </a:rPr>
-              <a:t>• 經文歌常以各聲部第一字組成複合標題：如 Factum est salutare / Dominus</a:t>
+              <a:t>• 常以各聲部首字組成複合標題：Factum est salutare / Dominus</a:t>
             </a:r>
             <a:endParaRPr lang="en-US" sz="1400" dirty="0"/>
           </a:p>
@@ -2927,7 +2893,7 @@
                 <a:ea typeface="Calibri" pitchFamily="34" charset="-122"/>
                 <a:cs typeface="Calibri" pitchFamily="34" charset="-120"/>
               </a:rPr>
-              <a:t>• 初期：拉丁宗教文本，以 clausula 為骨架 · 可在彌撒中演唱</a:t>
+              <a:t>• 初期：拉丁宗教文本以 clausula 為骨架，可在彌撒中演唱</a:t>
             </a:r>
             <a:endParaRPr lang="en-US" sz="1400" dirty="0"/>
           </a:p>
@@ -2944,7 +2910,7 @@
                 <a:ea typeface="Calibri" pitchFamily="34" charset="-122"/>
                 <a:cs typeface="Calibri" pitchFamily="34" charset="-120"/>
               </a:rPr>
-              <a:t>• 中期：增加第三、第四聲部 → double motet（兩歌詞）· triple motet（三歌詞）</a:t>
+              <a:t>• 中期：加入三、四聲部 → double / triple motet（多歌詞）</a:t>
             </a:r>
             <a:endParaRPr lang="en-US" sz="1400" dirty="0"/>
           </a:p>
@@ -2961,7 +2927,7 @@
                 <a:ea typeface="Calibri" pitchFamily="34" charset="-122"/>
                 <a:cs typeface="Calibri" pitchFamily="34" charset="-120"/>
               </a:rPr>
-              <a:t>• 後期：使用法文、世俗主題 → motet 脫離教會 · 成為文化菁英的娛樂</a:t>
+              <a:t>• 後期：法文、世俗主題 → 脫離教會，成為菁英的娛樂</a:t>
             </a:r>
             <a:endParaRPr lang="en-US" sz="1400" dirty="0"/>
           </a:p>
@@ -2978,7 +2944,7 @@
                 <a:ea typeface="Calibri" pitchFamily="34" charset="-122"/>
                 <a:cs typeface="Calibri" pitchFamily="34" charset="-120"/>
               </a:rPr>
-              <a:t>• tenor 原為聖詠段落，後成為純粹的音樂骨幹——Hieronymus de Moravia</a:t>
+              <a:t>• tenor 由聖詠段落轉為純音樂骨幹 → Hieronymus de Moravia ca. 1270 稱「cantus firmus」</a:t>
             </a:r>
             <a:endParaRPr lang="en-US" sz="1400" dirty="0"/>
           </a:p>
@@ -2995,41 +2961,7 @@
                 <a:ea typeface="Calibri" pitchFamily="34" charset="-122"/>
                 <a:cs typeface="Calibri" pitchFamily="34" charset="-120"/>
               </a:rPr>
-              <a:t>  ca. 1270 稱其為「cantus firmus」（固定曲調）</a:t>
-            </a:r>
-            <a:endParaRPr lang="en-US" sz="1400" dirty="0"/>
-          </a:p>
-          <a:p>
-            <a:pPr indent="0" marL="0">
-              <a:buNone/>
-            </a:pPr>
-            <a:r>
-              <a:rPr lang="en-US" sz="1400" dirty="0">
-                <a:solidFill>
-                  <a:srgbClr val="FBF5E6"/>
-                </a:solidFill>
-                <a:latin typeface="Calibri" pitchFamily="34" charset="0"/>
-                <a:ea typeface="Calibri" pitchFamily="34" charset="-122"/>
-                <a:cs typeface="Calibri" pitchFamily="34" charset="-120"/>
-              </a:rPr>
-              <a:t>• 至 13 世紀中葉，經文歌已取代 organum 與 conductus，成為主導的複音體裁</a:t>
-            </a:r>
-            <a:endParaRPr lang="en-US" sz="1400" dirty="0"/>
-          </a:p>
-          <a:p>
-            <a:pPr indent="0" marL="0">
-              <a:buNone/>
-            </a:pPr>
-            <a:r>
-              <a:rPr lang="en-US" sz="1400" dirty="0">
-                <a:solidFill>
-                  <a:srgbClr val="FBF5E6"/>
-                </a:solidFill>
-                <a:latin typeface="Calibri" pitchFamily="34" charset="0"/>
-                <a:ea typeface="Calibri" pitchFamily="34" charset="-122"/>
-                <a:cs typeface="Calibri" pitchFamily="34" charset="-120"/>
-              </a:rPr>
-              <a:t>  By mid-century, the motet displaced organum and conductus as the leading genre</a:t>
+              <a:t>• 13 世紀中葉 motet 取代 organum 與 conductus，成為主導體裁</a:t>
             </a:r>
             <a:endParaRPr lang="en-US" sz="1400" dirty="0"/>
           </a:p>
@@ -3623,7 +3555,7 @@
                 <a:ea typeface="Calibri" pitchFamily="34" charset="-122"/>
                 <a:cs typeface="Calibri" pitchFamily="34" charset="-120"/>
               </a:rPr>
-              <a:t>• 各上聲部獨立節奏 · 不再遵循節奏模式</a:t>
+              <a:t>• 各上聲部獨立節奏，不遵循節奏模式</a:t>
             </a:r>
             <a:endParaRPr lang="en-US" sz="1400" dirty="0"/>
           </a:p>
@@ -3714,7 +3646,7 @@
                 <a:ea typeface="Calibri" pitchFamily="34" charset="-122"/>
                 <a:cs typeface="Calibri" pitchFamily="34" charset="-120"/>
               </a:rPr>
-              <a:t>• 三聲部速度層級：tenor(慢)+duplum(中)+triplum(快)</a:t>
+              <a:t>• 三聲部速度層級：tenor 慢+duplum 中+triplum 快</a:t>
             </a:r>
             <a:endParaRPr lang="en-US" sz="1400" dirty="0"/>
           </a:p>
@@ -3772,23 +3704,6 @@
                 <a:cs typeface="Calibri" pitchFamily="34" charset="-120"/>
               </a:rPr>
               <a:t>• 三聲部分寫於同頁或對頁</a:t>
-            </a:r>
-            <a:endParaRPr lang="en-US" sz="1400" dirty="0"/>
-          </a:p>
-          <a:p>
-            <a:pPr indent="0" marL="0">
-              <a:buNone/>
-            </a:pPr>
-            <a:r>
-              <a:rPr lang="en-US" sz="1400" dirty="0">
-                <a:solidFill>
-                  <a:srgbClr val="E8D8A8"/>
-                </a:solidFill>
-                <a:latin typeface="Calibri" pitchFamily="34" charset="0"/>
-                <a:ea typeface="Calibri" pitchFamily="34" charset="-122"/>
-                <a:cs typeface="Calibri" pitchFamily="34" charset="-120"/>
-              </a:rPr>
-              <a:t>• triplum · motetus · tenor 各佔區域</a:t>
             </a:r>
             <a:endParaRPr lang="en-US" sz="1400" dirty="0"/>
           </a:p>
@@ -8562,7 +8477,7 @@
                 <a:ea typeface="Calibri" pitchFamily="34" charset="-122"/>
                 <a:cs typeface="Calibri" pitchFamily="34" charset="-120"/>
               </a:rPr>
-              <a:t>11–13 世紀複音的興起是西方音樂史上的重大轉折——多聲部協調、對位、和聲、垂直音響成為西方傳統的核心</a:t>
+              <a:t>11–13 世紀複音興起：對位、和聲、垂直音響成為西方傳統核心</a:t>
             </a:r>
             <a:endParaRPr lang="en-US" sz="1400" dirty="0"/>
           </a:p>
@@ -8579,7 +8494,7 @@
                 <a:ea typeface="Calibri" pitchFamily="34" charset="-122"/>
                 <a:cs typeface="Calibri" pitchFamily="34" charset="-120"/>
               </a:rPr>
-              <a:t>The rise of polyphony 11th–13th c. was a turning point: coordinated parts, counterpoint, harmony</a:t>
+              <a:t>Polyphony 11th–13th c.: counterpoint and harmony enter Western tradition</a:t>
             </a:r>
             <a:endParaRPr lang="en-US" sz="1400" dirty="0"/>
           </a:p>
@@ -8674,7 +8589,7 @@
                 <a:ea typeface="Calibri" pitchFamily="34" charset="-122"/>
                 <a:cs typeface="Calibri" pitchFamily="34" charset="-120"/>
               </a:rPr>
-              <a:t>當代為複音而發展的記譜法引入兩項永久特徵：聲部垂直對齊、用不同音符形狀表示相對時值</a:t>
+              <a:t>記譜法引入兩大特徵：聲部垂直對齊、音符形狀表時值</a:t>
             </a:r>
             <a:endParaRPr lang="en-US" sz="1400" dirty="0"/>
           </a:p>
@@ -8691,7 +8606,7 @@
                 <a:ea typeface="Calibri" pitchFamily="34" charset="-122"/>
                 <a:cs typeface="Calibri" pitchFamily="34" charset="-120"/>
               </a:rPr>
-              <a:t>Notation innovations: vertical alignment of parts; note shapes indicating duration</a:t>
+              <a:t>Notation: vertical alignment of parts; note shapes indicating duration</a:t>
             </a:r>
             <a:endParaRPr lang="en-US" sz="1400" dirty="0"/>
           </a:p>
@@ -8786,7 +8701,7 @@
                 <a:ea typeface="Calibri" pitchFamily="34" charset="-122"/>
                 <a:cs typeface="Calibri" pitchFamily="34" charset="-120"/>
               </a:rPr>
-              <a:t>巴黎聖母院學派創造了前所未見的音樂複雜度——長度、結構、三四聲部的協調，皆如同大教堂的建築</a:t>
+              <a:t>聖母院學派的音樂如大教堂——長度、結構、多聲部協調前所未見</a:t>
             </a:r>
             <a:endParaRPr lang="en-US" sz="1400" dirty="0"/>
           </a:p>
@@ -8803,7 +8718,7 @@
                 <a:ea typeface="Calibri" pitchFamily="34" charset="-122"/>
                 <a:cs typeface="Calibri" pitchFamily="34" charset="-120"/>
               </a:rPr>
-              <a:t>Notre Dame's music matched the cathedral: unprecedented length, structure, grandeur</a:t>
+              <a:t>Notre Dame music matched the cathedral: length, structure, grandeur</a:t>
             </a:r>
             <a:endParaRPr lang="en-US" sz="1400" dirty="0"/>
           </a:p>
@@ -8898,7 +8813,7 @@
                 <a:ea typeface="Calibri" pitchFamily="34" charset="-122"/>
                 <a:cs typeface="Calibri" pitchFamily="34" charset="-120"/>
               </a:rPr>
-              <a:t>經文歌從 clausula 的填詞演變為世俗菁英的娛樂——成為複音音樂的主導體裁直到中世紀末</a:t>
+              <a:t>經文歌由 clausula 填詞演變為世俗娛樂，主導中世紀晚期</a:t>
             </a:r>
             <a:endParaRPr lang="en-US" sz="1400" dirty="0"/>
           </a:p>
@@ -8915,7 +8830,7 @@
                 <a:ea typeface="Calibri" pitchFamily="34" charset="-122"/>
                 <a:cs typeface="Calibri" pitchFamily="34" charset="-120"/>
               </a:rPr>
-              <a:t>The motet evolved from clausula trope to elite entertainment, dominating through the late Middle Ages</a:t>
+              <a:t>The motet evolved from clausula trope to elite entertainment</a:t>
             </a:r>
             <a:endParaRPr lang="en-US" sz="1400" dirty="0"/>
           </a:p>
@@ -9010,7 +8925,7 @@
                 <a:ea typeface="Calibri" pitchFamily="34" charset="-122"/>
                 <a:cs typeface="Calibri" pitchFamily="34" charset="-120"/>
               </a:rPr>
-              <a:t>大多數中世紀複音只存活了一兩代——後被視為「粗糙」· 直到 20 世紀才重新被發掘</a:t>
+              <a:t>大多中世紀複音一兩代後即被視為粗糙，20 世紀才重新發掘</a:t>
             </a:r>
             <a:endParaRPr lang="en-US" sz="1400" dirty="0"/>
           </a:p>
@@ -9027,7 +8942,7 @@
                 <a:ea typeface="Calibri" pitchFamily="34" charset="-122"/>
                 <a:cs typeface="Calibri" pitchFamily="34" charset="-120"/>
               </a:rPr>
-              <a:t>Most medieval polyphony faded within a generation or two; revived only in the 20th century</a:t>
+              <a:t>Most medieval polyphony faded quickly, revived only in the 20th c.</a:t>
             </a:r>
             <a:endParaRPr lang="en-US" sz="1400" dirty="0"/>
           </a:p>
@@ -9122,7 +9037,7 @@
                 <a:ea typeface="Calibri" pitchFamily="34" charset="-122"/>
                 <a:cs typeface="Calibri" pitchFamily="34" charset="-120"/>
               </a:rPr>
-              <a:t>中世紀的聲響啟發了 Debussy 的平行和弦、極簡主義的重複模式、嘻哈的分層文本——古老音樂的回聲</a:t>
+              <a:t>中世紀聲響回聲於 Debussy 的平行和弦、極簡主義、嘻哈分層文本</a:t>
             </a:r>
             <a:endParaRPr lang="en-US" sz="1400" dirty="0"/>
           </a:p>
@@ -9139,7 +9054,7 @@
                 <a:ea typeface="Calibri" pitchFamily="34" charset="-122"/>
                 <a:cs typeface="Calibri" pitchFamily="34" charset="-120"/>
               </a:rPr>
-              <a:t>Medieval sounds echo in Debussy, minimalism, and even the layered texts of hip hop</a:t>
+              <a:t>Medieval sounds echo in Debussy, minimalism, and hip hop</a:t>
             </a:r>
             <a:endParaRPr lang="en-US" sz="1400" dirty="0"/>
           </a:p>
@@ -12159,8 +12074,8 @@
         </p:nvSpPr>
         <p:spPr>
           <a:xfrm>
-            <a:off x="274320" y="3063240"/>
-            <a:ext cx="4206240" cy="1737360"/>
+            <a:off x="274320" y="3017520"/>
+            <a:ext cx="4206240" cy="1828800"/>
           </a:xfrm>
           <a:prstGeom prst="rect">
             <a:avLst/>
@@ -12179,7 +12094,7 @@
         </p:nvSpPr>
         <p:spPr>
           <a:xfrm>
-            <a:off x="411480" y="3127248"/>
+            <a:off x="411480" y="3072384"/>
             <a:ext cx="3931920" cy="365760"/>
           </a:xfrm>
           <a:prstGeom prst="rect">
@@ -12218,17 +12133,17 @@
         </p:nvSpPr>
         <p:spPr>
           <a:xfrm>
-            <a:off x="457200" y="3584448"/>
-            <a:ext cx="3840480" cy="1179576"/>
-          </a:xfrm>
-          <a:prstGeom prst="rect">
-            <a:avLst/>
-          </a:prstGeom>
-          <a:noFill/>
-          <a:ln/>
-        </p:spPr>
-        <p:txBody>
-          <a:bodyPr wrap="square" rtlCol="0" anchor="t"/>
+            <a:off x="457200" y="3493008"/>
+            <a:ext cx="3840480" cy="1316736"/>
+          </a:xfrm>
+          <a:prstGeom prst="rect">
+            <a:avLst/>
+          </a:prstGeom>
+          <a:noFill/>
+          <a:ln/>
+        </p:spPr>
+        <p:txBody>
+          <a:bodyPr wrap="square" lIns="0" tIns="0" rIns="0" bIns="0" rtlCol="0" anchor="t"/>
           <a:lstStyle/>
           <a:p>
             <a:pPr indent="0" marL="0">
@@ -12243,7 +12158,7 @@
                 <a:ea typeface="Calibri" pitchFamily="34" charset="-122"/>
                 <a:cs typeface="Calibri" pitchFamily="34" charset="-120"/>
               </a:rPr>
-              <a:t>• 11 世紀後期 · 附加聲部置於聖詠之上</a:t>
+              <a:t>• 11 世紀後期；附加聲部置於聖詠之上</a:t>
             </a:r>
             <a:endParaRPr lang="en-US" sz="1400" dirty="0"/>
           </a:p>
@@ -12325,8 +12240,8 @@
         </p:nvSpPr>
         <p:spPr>
           <a:xfrm>
-            <a:off x="4663440" y="3063240"/>
-            <a:ext cx="4206240" cy="1737360"/>
+            <a:off x="4663440" y="3017520"/>
+            <a:ext cx="4206240" cy="1828800"/>
           </a:xfrm>
           <a:prstGeom prst="rect">
             <a:avLst/>
@@ -12345,7 +12260,7 @@
         </p:nvSpPr>
         <p:spPr>
           <a:xfrm>
-            <a:off x="4800600" y="3127248"/>
+            <a:off x="4800600" y="3072384"/>
             <a:ext cx="3931920" cy="365760"/>
           </a:xfrm>
           <a:prstGeom prst="rect">
@@ -12384,17 +12299,17 @@
         </p:nvSpPr>
         <p:spPr>
           <a:xfrm>
-            <a:off x="4846320" y="3584448"/>
-            <a:ext cx="3840480" cy="1179576"/>
-          </a:xfrm>
-          <a:prstGeom prst="rect">
-            <a:avLst/>
-          </a:prstGeom>
-          <a:noFill/>
-          <a:ln/>
-        </p:spPr>
-        <p:txBody>
-          <a:bodyPr wrap="square" rtlCol="0" anchor="t"/>
+            <a:off x="4846320" y="3493008"/>
+            <a:ext cx="3840480" cy="1316736"/>
+          </a:xfrm>
+          <a:prstGeom prst="rect">
+            <a:avLst/>
+          </a:prstGeom>
+          <a:noFill/>
+          <a:ln/>
+        </p:spPr>
+        <p:txBody>
+          <a:bodyPr wrap="square" lIns="0" tIns="0" rIns="0" bIns="0" rtlCol="0" anchor="t"/>
           <a:lstStyle/>
           <a:p>
             <a:pPr indent="0" marL="0">
@@ -12443,7 +12358,7 @@
                 <a:ea typeface="Calibri" pitchFamily="34" charset="-122"/>
                 <a:cs typeface="Calibri" pitchFamily="34" charset="-120"/>
               </a:rPr>
-              <a:t>• 提供音對音複音的具體範例</a:t>
+              <a:t>• 提供音對音複音具體範例</a:t>
             </a:r>
             <a:endParaRPr lang="en-US" sz="1400" dirty="0"/>
           </a:p>
@@ -12460,7 +12375,7 @@
                 <a:ea typeface="Calibri" pitchFamily="34" charset="-122"/>
                 <a:cs typeface="Calibri" pitchFamily="34" charset="-120"/>
               </a:rPr>
-              <a:t>• 此時複音仍被視為對聖詠的即興裝飾</a:t>
+              <a:t>• 複音仍被視為對聖詠的即興裝飾</a:t>
             </a:r>
             <a:endParaRPr lang="en-US" sz="1400" dirty="0"/>
           </a:p>
@@ -12477,24 +12392,7 @@
                 <a:ea typeface="Calibri" pitchFamily="34" charset="-122"/>
                 <a:cs typeface="Calibri" pitchFamily="34" charset="-120"/>
               </a:rPr>
-              <a:t>• 手稿中的記譜僅供教學——實際演唱</a:t>
-            </a:r>
-            <a:endParaRPr lang="en-US" sz="1400" dirty="0"/>
-          </a:p>
-          <a:p>
-            <a:pPr indent="0" marL="0">
-              <a:buNone/>
-            </a:pPr>
-            <a:r>
-              <a:rPr lang="en-US" sz="1400" dirty="0">
-                <a:solidFill>
-                  <a:srgbClr val="FBF5E6"/>
-                </a:solidFill>
-                <a:latin typeface="Calibri" pitchFamily="34" charset="0"/>
-                <a:ea typeface="Calibri" pitchFamily="34" charset="-122"/>
-                <a:cs typeface="Calibri" pitchFamily="34" charset="-120"/>
-              </a:rPr>
-              <a:t>  大多仍為即興與口傳</a:t>
+              <a:t>• 記譜僅供教學；實際多為即興口傳</a:t>
             </a:r>
             <a:endParaRPr lang="en-US" sz="1400" dirty="0"/>
           </a:p>
@@ -13420,8 +13318,8 @@
         </p:nvSpPr>
         <p:spPr>
           <a:xfrm>
-            <a:off x="274320" y="1097280"/>
-            <a:ext cx="8595360" cy="1737360"/>
+            <a:off x="274320" y="1078992"/>
+            <a:ext cx="8595360" cy="1828800"/>
           </a:xfrm>
           <a:prstGeom prst="rect">
             <a:avLst/>
@@ -13440,7 +13338,7 @@
         </p:nvSpPr>
         <p:spPr>
           <a:xfrm>
-            <a:off x="411480" y="1161288"/>
+            <a:off x="411480" y="1133856"/>
             <a:ext cx="8321040" cy="365760"/>
           </a:xfrm>
           <a:prstGeom prst="rect">
@@ -13479,17 +13377,17 @@
         </p:nvSpPr>
         <p:spPr>
           <a:xfrm>
-            <a:off x="457200" y="1618488"/>
-            <a:ext cx="8229600" cy="1170432"/>
-          </a:xfrm>
-          <a:prstGeom prst="rect">
-            <a:avLst/>
-          </a:prstGeom>
-          <a:noFill/>
-          <a:ln/>
-        </p:spPr>
-        <p:txBody>
-          <a:bodyPr wrap="square" rtlCol="0" anchor="t"/>
+            <a:off x="457200" y="1554480"/>
+            <a:ext cx="8229600" cy="1325880"/>
+          </a:xfrm>
+          <a:prstGeom prst="rect">
+            <a:avLst/>
+          </a:prstGeom>
+          <a:noFill/>
+          <a:ln/>
+        </p:spPr>
+        <p:txBody>
+          <a:bodyPr wrap="square" lIns="0" tIns="0" rIns="0" bIns="0" rtlCol="0" anchor="t"/>
           <a:lstStyle/>
           <a:p>
             <a:pPr indent="0" marL="0">
@@ -13504,7 +13402,7 @@
                 <a:ea typeface="Calibri" pitchFamily="34" charset="-122"/>
                 <a:cs typeface="Calibri" pitchFamily="34" charset="-120"/>
               </a:rPr>
-              <a:t>• 建築工程：奠基 ca. 1160 · 祭壇區 1182 · 首祭 1183 · 中殿 ca. 1200 · 正立面 ca. 1250</a:t>
+              <a:t>• 建築：奠基 ca. 1160、祭壇 1182、中殿 ca. 1200、正立面 ca. 1250</a:t>
             </a:r>
             <a:endParaRPr lang="en-US" sz="1400" dirty="0"/>
           </a:p>
@@ -13521,7 +13419,7 @@
                 <a:ea typeface="Calibri" pitchFamily="34" charset="-122"/>
                 <a:cs typeface="Calibri" pitchFamily="34" charset="-120"/>
               </a:rPr>
-              <a:t>  Foundations ca. 1160, choir 1182, first mass 1183, nave ca. 1200, façade ca. 1250</a:t>
+              <a:t>  Choir 1182, nave ca. 1200, façade ca. 1250</a:t>
             </a:r>
             <a:endParaRPr lang="en-US" sz="1400" dirty="0"/>
           </a:p>
@@ -13538,7 +13436,7 @@
                 <a:ea typeface="Calibri" pitchFamily="34" charset="-122"/>
                 <a:cs typeface="Calibri" pitchFamily="34" charset="-120"/>
               </a:rPr>
-              <a:t>• 與巴黎大學（ca. 1150 創立）在地理與人脈上密不可分——是哲學與神學的中心</a:t>
+              <a:t>• 與巴黎大學（ca. 1150）密不可分——哲學與神學的中心</a:t>
             </a:r>
             <a:endParaRPr lang="en-US" sz="1400" dirty="0"/>
           </a:p>
@@ -13555,7 +13453,7 @@
                 <a:ea typeface="Calibri" pitchFamily="34" charset="-122"/>
                 <a:cs typeface="Calibri" pitchFamily="34" charset="-120"/>
               </a:rPr>
-              <a:t>  Linked to the nascent University of Paris — a center of Scholastic thought</a:t>
+              <a:t>  Linked to the University of Paris — center of Scholastic thought</a:t>
             </a:r>
             <a:endParaRPr lang="en-US" sz="1400" dirty="0"/>
           </a:p>
@@ -13572,7 +13470,7 @@
                 <a:ea typeface="Calibri" pitchFamily="34" charset="-122"/>
                 <a:cs typeface="Calibri" pitchFamily="34" charset="-120"/>
               </a:rPr>
-              <a:t>• 其建築的高度、華麗、結構複雜——音樂也對應地變得又長、又繁、又結構化</a:t>
+              <a:t>• 音樂亦長、繁、結構化——仿教堂建築</a:t>
             </a:r>
             <a:endParaRPr lang="en-US" sz="1400" dirty="0"/>
           </a:p>
@@ -13589,7 +13487,7 @@
                 <a:ea typeface="Calibri" pitchFamily="34" charset="-122"/>
                 <a:cs typeface="Calibri" pitchFamily="34" charset="-120"/>
               </a:rPr>
-              <a:t>  The music paralleled the cathedral: long, intricate, carefully structured</a:t>
+              <a:t>  Music paralleled the cathedral: long, intricate, structured</a:t>
             </a:r>
             <a:endParaRPr lang="en-US" sz="1400" dirty="0"/>
           </a:p>
@@ -13603,8 +13501,8 @@
         </p:nvSpPr>
         <p:spPr>
           <a:xfrm>
-            <a:off x="274320" y="2926080"/>
-            <a:ext cx="8595360" cy="1874520"/>
+            <a:off x="274320" y="2971800"/>
+            <a:ext cx="8595360" cy="1828800"/>
           </a:xfrm>
           <a:prstGeom prst="rect">
             <a:avLst/>
@@ -13623,7 +13521,7 @@
         </p:nvSpPr>
         <p:spPr>
           <a:xfrm>
-            <a:off x="411480" y="2990088"/>
+            <a:off x="411480" y="3035808"/>
             <a:ext cx="8321040" cy="365760"/>
           </a:xfrm>
           <a:prstGeom prst="rect">
@@ -13662,17 +13560,17 @@
         </p:nvSpPr>
         <p:spPr>
           <a:xfrm>
-            <a:off x="457200" y="3447288"/>
-            <a:ext cx="8229600" cy="1307592"/>
-          </a:xfrm>
-          <a:prstGeom prst="rect">
-            <a:avLst/>
-          </a:prstGeom>
-          <a:noFill/>
-          <a:ln/>
-        </p:spPr>
-        <p:txBody>
-          <a:bodyPr wrap="square" rtlCol="0" anchor="t"/>
+            <a:off x="457200" y="3456432"/>
+            <a:ext cx="8229600" cy="1325880"/>
+          </a:xfrm>
+          <a:prstGeom prst="rect">
+            <a:avLst/>
+          </a:prstGeom>
+          <a:noFill/>
+          <a:ln/>
+        </p:spPr>
+        <p:txBody>
+          <a:bodyPr wrap="square" lIns="0" tIns="0" rIns="0" bIns="0" rtlCol="0" anchor="t"/>
           <a:lstStyle/>
           <a:p>
             <a:pPr indent="0" marL="0">
@@ -13687,7 +13585,7 @@
                 <a:ea typeface="Calibri" pitchFamily="34" charset="-122"/>
                 <a:cs typeface="Calibri" pitchFamily="34" charset="-120"/>
               </a:rPr>
-              <a:t>• 此曲目在西歐傳唱逾一世紀——從西班牙到波蘭、從義大利到蘇格蘭</a:t>
+              <a:t>• 曲目在西歐傳唱逾一世紀——從西班牙到蘇格蘭</a:t>
             </a:r>
             <a:endParaRPr lang="en-US" sz="1400" dirty="0"/>
           </a:p>
@@ -13704,7 +13602,7 @@
                 <a:ea typeface="Calibri" pitchFamily="34" charset="-122"/>
                 <a:cs typeface="Calibri" pitchFamily="34" charset="-120"/>
               </a:rPr>
-              <a:t>  Repertory sung for over a century across Europe from Spain to Poland</a:t>
+              <a:t>  Sung across Europe for over a century</a:t>
             </a:r>
             <a:endParaRPr lang="en-US" sz="1400" dirty="0"/>
           </a:p>
@@ -13721,7 +13619,7 @@
                 <a:ea typeface="Calibri" pitchFamily="34" charset="-122"/>
                 <a:cs typeface="Calibri" pitchFamily="34" charset="-120"/>
               </a:rPr>
-              <a:t>• 現存最早手稿來自 1240 年代——比曲目本身晚了數十年</a:t>
+              <a:t>• 現存最早手稿來自 1240 年代，晚於曲目數十年</a:t>
             </a:r>
             <a:endParaRPr lang="en-US" sz="1400" dirty="0"/>
           </a:p>
@@ -13738,7 +13636,7 @@
                 <a:ea typeface="Calibri" pitchFamily="34" charset="-122"/>
                 <a:cs typeface="Calibri" pitchFamily="34" charset="-120"/>
               </a:rPr>
-              <a:t>  Earliest manuscripts date from 1240s, decades after the music was first created</a:t>
+              <a:t>  Earliest manuscripts from the 1240s</a:t>
             </a:r>
             <a:endParaRPr lang="en-US" sz="1400" dirty="0"/>
           </a:p>
@@ -13755,7 +13653,7 @@
                 <a:ea typeface="Calibri" pitchFamily="34" charset="-122"/>
                 <a:cs typeface="Calibri" pitchFamily="34" charset="-120"/>
               </a:rPr>
-              <a:t>• 同一曲在不同手稿中文本差異明顯 → 顯示口傳與即興仍為主要媒介</a:t>
+              <a:t>• 同曲在不同手稿中文本差異——顯示口傳為主要媒介</a:t>
             </a:r>
             <a:endParaRPr lang="en-US" sz="1400" dirty="0"/>
           </a:p>
@@ -13772,24 +13670,7 @@
                 <a:ea typeface="Calibri" pitchFamily="34" charset="-122"/>
                 <a:cs typeface="Calibri" pitchFamily="34" charset="-120"/>
               </a:rPr>
-              <a:t>  Versions vary between manuscripts — evidence of oral transmission alongside writing</a:t>
-            </a:r>
-            <a:endParaRPr lang="en-US" sz="1400" dirty="0"/>
-          </a:p>
-          <a:p>
-            <a:pPr indent="0" marL="0">
-              <a:buNone/>
-            </a:pPr>
-            <a:r>
-              <a:rPr lang="en-US" sz="1400" dirty="0">
-                <a:solidFill>
-                  <a:srgbClr val="FBF5E6"/>
-                </a:solidFill>
-                <a:latin typeface="Calibri" pitchFamily="34" charset="0"/>
-                <a:ea typeface="Calibri" pitchFamily="34" charset="-122"/>
-                <a:cs typeface="Calibri" pitchFamily="34" charset="-120"/>
-              </a:rPr>
-              <a:t>• 梵蒂岡所藏一份 ca. 1200 年巴黎抄本描述「如何即興演唱 Notre Dame 風格的奧爾加農」</a:t>
+              <a:t>  Manuscript variations show oral transmission</a:t>
             </a:r>
             <a:endParaRPr lang="en-US" sz="1400" dirty="0"/>
           </a:p>
@@ -13973,17 +13854,17 @@
         </p:nvSpPr>
         <p:spPr>
           <a:xfrm>
-            <a:off x="365760" y="1143000"/>
-            <a:ext cx="8412480" cy="274320"/>
-          </a:xfrm>
-          <a:prstGeom prst="rect">
-            <a:avLst/>
-          </a:prstGeom>
-          <a:noFill/>
-          <a:ln/>
-        </p:spPr>
-        <p:txBody>
-          <a:bodyPr wrap="square" rtlCol="0" anchor="t"/>
+            <a:off x="365760" y="1115568"/>
+            <a:ext cx="8412480" cy="320040"/>
+          </a:xfrm>
+          <a:prstGeom prst="rect">
+            <a:avLst/>
+          </a:prstGeom>
+          <a:noFill/>
+          <a:ln/>
+        </p:spPr>
+        <p:txBody>
+          <a:bodyPr wrap="square" lIns="0" tIns="0" rIns="0" bIns="0" rtlCol="0" anchor="t"/>
           <a:lstStyle/>
           <a:p>
             <a:pPr algn="ctr" indent="0" marL="0">
@@ -13998,7 +13879,7 @@
                 <a:ea typeface="Calibri" pitchFamily="34" charset="-122"/>
                 <a:cs typeface="Calibri" pitchFamily="34" charset="-120"/>
               </a:rPr>
-              <a:t>Johannes de Garlandia (ca. 1260) 在 De mensurabili musica 中歸納為六種「模式」，以連音符組合（ligatures）表示</a:t>
+              <a:t>Johannes de Garlandia (ca. 1260) 在 De mensurabili musica 歸納為六種「模式」，以連音符組合表示</a:t>
             </a:r>
             <a:endParaRPr lang="en-US" sz="1400" dirty="0"/>
           </a:p>
